--- a/docs/교재/실전반_오프라인/07회차/실전반_오프라인_07회차.pptx
+++ b/docs/교재/실전반_오프라인/07회차/실전반_오프라인_07회차.pptx
@@ -1027,7 +1027,7 @@
           <a:lstStyle/>
           <a:p>
             <a:r>
-              <a:t>승인된 처리 건에서 작업을 실제로 맡은 쪽입니다. 진단과 제안은 에이전트가, 승인은 운전원 역할이, 명령과 재관측과 작업지시 등록과 결과 보고는 시스템들이 맡았습니다. 레인의 배치를 보면 설비를 움직이는 냉각 명령 앞에 사람의 승인이 놓여 있습니다. 누가 판단하고 누가 결정하고 누가 실행하는지를 그림이 정해 둡니다.</a:t>
+              <a:t>승인된 처리 건에서 작업을 실제로 맡은 쪽입니다. 진단과 제안은 에이전트가, 승인은 운전원 역할이, 명령과 재관측과 작업지시 등록과 결과 보고는 시스템들이 맡았습니다. SCADA는 설비를 감시하고 제어하는 시스템으로 승인된 냉각 명령을 PLC에 전하고, CMMS는 정비 작업을 관리하는 시스템으로 작업지시가 여기에 등록됩니다. 레인의 배치를 보면 설비를 움직이는 냉각 명령 앞에 사람의 승인이 놓여 있습니다. 누가 판단하고 누가 결정하고 누가 실행하는지를 그림이 정해 둡니다.</a:t>
             </a:r>
           </a:p>
         </p:txBody>
@@ -6656,7 +6656,7 @@
       </p:sp>
       <p:pic>
         <p:nvPicPr>
-          <p:cNvPr id="6" name="삽화:흐름_전체.svg" descr="illust_2391159163898136241_1791735769.png"/>
+          <p:cNvPr id="6" name="삽화:흐름_전체.svg" descr="illust_2092363261827362999_1791735769.png"/>
           <p:cNvPicPr>
             <a:picLocks noChangeAspect="1"/>
           </p:cNvPicPr>
@@ -7524,7 +7524,7 @@
       </p:sp>
       <p:pic>
         <p:nvPicPr>
-          <p:cNvPr id="6" name="삽화:이벤트.svg" descr="illust_6483573160818285396_1791735769.png"/>
+          <p:cNvPr id="6" name="삽화:이벤트.svg" descr="illust_6923992438739516030_1791735769.png"/>
           <p:cNvPicPr>
             <a:picLocks noChangeAspect="1"/>
           </p:cNvPicPr>
@@ -8014,7 +8014,7 @@
       </p:sp>
       <p:pic>
         <p:nvPicPr>
-          <p:cNvPr id="6" name="삽화:작업종류.svg" descr="illust_3089694314233616666_1791735769.png"/>
+          <p:cNvPr id="6" name="삽화:작업종류.svg" descr="illust_2861933255919581986_1791735769.png"/>
           <p:cNvPicPr>
             <a:picLocks noChangeAspect="1"/>
           </p:cNvPicPr>
@@ -8672,7 +8672,7 @@
       </p:sp>
       <p:pic>
         <p:nvPicPr>
-          <p:cNvPr id="6" name="삽화:게이트웨이.svg" descr="illust_738057215822213006_1791735769.png"/>
+          <p:cNvPr id="6" name="삽화:게이트웨이.svg" descr="illust_618538756852762560_1791735769.png"/>
           <p:cNvPicPr>
             <a:picLocks noChangeAspect="1"/>
           </p:cNvPicPr>
@@ -9267,7 +9267,7 @@
       </p:sp>
       <p:pic>
         <p:nvPicPr>
-          <p:cNvPr id="6" name="삽화:풀과레인.svg" descr="illust_4370121768389751080_1791735769.png"/>
+          <p:cNvPr id="6" name="삽화:풀과레인.svg" descr="illust_8176861675550739618_1791735769.png"/>
           <p:cNvPicPr>
             <a:picLocks noChangeAspect="1"/>
           </p:cNvPicPr>
@@ -9883,7 +9883,7 @@
       </p:sp>
       <p:pic>
         <p:nvPicPr>
-          <p:cNvPr id="6" name="삽화:경계타이머.svg" descr="illust_418830406327167616_1791735769.png"/>
+          <p:cNvPr id="6" name="삽화:경계타이머.svg" descr="illust_5532372235755454887_1791735769.png"/>
           <p:cNvPicPr>
             <a:picLocks noChangeAspect="1"/>
           </p:cNvPicPr>
@@ -10373,7 +10373,7 @@
       </p:sp>
       <p:pic>
         <p:nvPicPr>
-          <p:cNvPr id="6" name="삽화:승인자리.svg" descr="illust_2430641231219397290_1791735769.png"/>
+          <p:cNvPr id="6" name="삽화:승인자리.svg" descr="illust_354751592111261425_1791735769.png"/>
           <p:cNvPicPr>
             <a:picLocks noChangeAspect="1"/>
           </p:cNvPicPr>
@@ -12511,7 +12511,7 @@
                 <a:ea typeface="맑은 고딕"/>
                 <a:cs typeface="맑은 고딕"/>
               </a:rPr>
-              <a:t>SCADA · sys:scada</a:t>
+              <a:t>SCADA(Supervisory Control and Data Acquisition) · sys:scada</a:t>
             </a:r>
           </a:p>
         </p:txBody>
@@ -12807,7 +12807,7 @@
                 <a:ea typeface="맑은 고딕"/>
                 <a:cs typeface="맑은 고딕"/>
               </a:rPr>
-              <a:t>CMMS · sys:cmms</a:t>
+              <a:t>CMMS(Computerized Maintenance Management System) · sys:cmms</a:t>
             </a:r>
           </a:p>
         </p:txBody>
@@ -15720,7 +15720,7 @@
       </p:sp>
       <p:pic>
         <p:nvPicPr>
-          <p:cNvPr id="6" name="삽화:정의와인스턴스.svg" descr="illust_5308926339366551185_1791735769.png"/>
+          <p:cNvPr id="6" name="삽화:정의와인스턴스.svg" descr="illust_8461785158163694038_1791735769.png"/>
           <p:cNvPicPr>
             <a:picLocks noChangeAspect="1"/>
           </p:cNvPicPr>
@@ -27071,7 +27071,7 @@
       </p:sp>
       <p:pic>
         <p:nvPicPr>
-          <p:cNvPr id="6" name="삽화:남은일_추천뒤.svg" descr="illust_4518163083786032438_1791735769.png"/>
+          <p:cNvPr id="6" name="삽화:남은일_추천뒤.svg" descr="illust_5534446765537904069_1791735769.png"/>
           <p:cNvPicPr>
             <a:picLocks noChangeAspect="1"/>
           </p:cNvPicPr>

--- a/docs/교재/실전반_오프라인/07회차/실전반_오프라인_07회차.pptx
+++ b/docs/교재/실전반_오프라인/07회차/실전반_오프라인_07회차.pptx
@@ -1377,7 +1377,7 @@
           <a:lstStyle/>
           <a:p>
             <a:r>
-              <a:t>첫 실습에서는 bpmn.io라는 도구로 작은 승인 절차를 직접 그립니다. 정비 요청으로 시작해 담당자가 확인하고, 승인 여부에 따라 승인 종료와 반려 종료로 갈립니다. 게이트웨이의 두 갈래가 빠짐없이 끝 이벤트에 닿는지를 확인합니다. 끝나면 BPMN 파일 하나가 만들어집니다.</a:t>
+              <a:t>첫 실습에서는 bpmn.io라는 도구로 작은 승인 절차를 직접 그립니다. 정비 요청으로 시작해 담당자가 확인하고, 승인 여부에 따라 승인 종료와 거절 종결로 갈립니다. 게이트웨이의 두 갈래가 빠짐없이 끝 이벤트에 닿는지를 확인합니다. 끝나면 BPMN 파일 하나가 만들어집니다.</a:t>
             </a:r>
           </a:p>
         </p:txBody>
@@ -6656,7 +6656,7 @@
       </p:sp>
       <p:pic>
         <p:nvPicPr>
-          <p:cNvPr id="6" name="삽화:흐름_전체.svg" descr="illust_2092363261827362999_1791735769.png"/>
+          <p:cNvPr id="6" name="삽화:흐름_전체.svg" descr="illust_4701525306918566425_1791735769.png"/>
           <p:cNvPicPr>
             <a:picLocks noChangeAspect="1"/>
           </p:cNvPicPr>
@@ -7524,7 +7524,7 @@
       </p:sp>
       <p:pic>
         <p:nvPicPr>
-          <p:cNvPr id="6" name="삽화:이벤트.svg" descr="illust_6923992438739516030_1791735769.png"/>
+          <p:cNvPr id="6" name="삽화:이벤트.svg" descr="illust_2354739156562542482_1791735769.png"/>
           <p:cNvPicPr>
             <a:picLocks noChangeAspect="1"/>
           </p:cNvPicPr>
@@ -8014,7 +8014,7 @@
       </p:sp>
       <p:pic>
         <p:nvPicPr>
-          <p:cNvPr id="6" name="삽화:작업종류.svg" descr="illust_2861933255919581986_1791735769.png"/>
+          <p:cNvPr id="6" name="삽화:작업종류.svg" descr="illust_1927571425715457758_1791735769.png"/>
           <p:cNvPicPr>
             <a:picLocks noChangeAspect="1"/>
           </p:cNvPicPr>
@@ -8672,7 +8672,7 @@
       </p:sp>
       <p:pic>
         <p:nvPicPr>
-          <p:cNvPr id="6" name="삽화:게이트웨이.svg" descr="illust_618538756852762560_1791735769.png"/>
+          <p:cNvPr id="6" name="삽화:게이트웨이.svg" descr="illust_6520716322086374794_1791735769.png"/>
           <p:cNvPicPr>
             <a:picLocks noChangeAspect="1"/>
           </p:cNvPicPr>
@@ -9267,7 +9267,7 @@
       </p:sp>
       <p:pic>
         <p:nvPicPr>
-          <p:cNvPr id="6" name="삽화:풀과레인.svg" descr="illust_8176861675550739618_1791735769.png"/>
+          <p:cNvPr id="6" name="삽화:풀과레인.svg" descr="illust_7106216621252298783_1791735769.png"/>
           <p:cNvPicPr>
             <a:picLocks noChangeAspect="1"/>
           </p:cNvPicPr>
@@ -9883,7 +9883,7 @@
       </p:sp>
       <p:pic>
         <p:nvPicPr>
-          <p:cNvPr id="6" name="삽화:경계타이머.svg" descr="illust_5532372235755454887_1791735769.png"/>
+          <p:cNvPr id="6" name="삽화:경계타이머.svg" descr="illust_886228050904695173_1791735769.png"/>
           <p:cNvPicPr>
             <a:picLocks noChangeAspect="1"/>
           </p:cNvPicPr>
@@ -10373,7 +10373,7 @@
       </p:sp>
       <p:pic>
         <p:nvPicPr>
-          <p:cNvPr id="6" name="삽화:승인자리.svg" descr="illust_354751592111261425_1791735769.png"/>
+          <p:cNvPr id="6" name="삽화:승인자리.svg" descr="illust_7669893451573222790_1791735769.png"/>
           <p:cNvPicPr>
             <a:picLocks noChangeAspect="1"/>
           </p:cNvPicPr>
@@ -15720,7 +15720,7 @@
       </p:sp>
       <p:pic>
         <p:nvPicPr>
-          <p:cNvPr id="6" name="삽화:정의와인스턴스.svg" descr="illust_8461785158163694038_1791735769.png"/>
+          <p:cNvPr id="6" name="삽화:정의와인스턴스.svg" descr="illust_11058753127625810_1791735769.png"/>
           <p:cNvPicPr>
             <a:picLocks noChangeAspect="1"/>
           </p:cNvPicPr>
@@ -16398,7 +16398,7 @@
                 <a:ea typeface="맑은 고딕"/>
                 <a:cs typeface="맑은 고딕"/>
               </a:rPr>
-              <a:t>이 실습을 마치면 정비 요청에서 승인 종료와 반려 종료까지를 그린 BPMN 파일 하나가 만들어진다.</a:t>
+              <a:t>이 실습을 마치면 정비 요청에서 승인 종료와 거절 종결까지를 그린 BPMN 파일 하나가 만들어진다.</a:t>
             </a:r>
           </a:p>
         </p:txBody>
@@ -17227,7 +17227,7 @@
                 <a:ea typeface="맑은 고딕"/>
                 <a:cs typeface="맑은 고딕"/>
               </a:rPr>
-              <a:t>반려 종료에</a:t>
+              <a:t>거절 종결에</a:t>
             </a:r>
           </a:p>
           <a:p>
@@ -27071,7 +27071,7 @@
       </p:sp>
       <p:pic>
         <p:nvPicPr>
-          <p:cNvPr id="6" name="삽화:남은일_추천뒤.svg" descr="illust_5534446765537904069_1791735769.png"/>
+          <p:cNvPr id="6" name="삽화:남은일_추천뒤.svg" descr="illust_316579673618501675_1791735769.png"/>
           <p:cNvPicPr>
             <a:picLocks noChangeAspect="1"/>
           </p:cNvPicPr>

--- a/docs/교재/실전반_오프라인/07회차/실전반_오프라인_07회차.pptx
+++ b/docs/교재/실전반_오프라인/07회차/실전반_오프라인_07회차.pptx
@@ -537,7 +537,7 @@
           <a:lstStyle/>
           <a:p>
             <a:r>
-              <a:t>앞의 세 회차에서는 에이전트를 만들고 검증했습니다. 오늘부터는 그 에이전트의 추천을 사람의 승인과 시스템의 실행으로 잇는 프로세스를 다룹니다. 프로세스의 정의와 BPMN 표기와 실행 방식을 짚은 뒤, 네 실습에서 긴급 대응 프로세스를 직접 그려 배포합니다. 이 네 가지를 자료 없이 자신의 말로 설명할 수 있는지가 오늘의 기준입니다.</a:t>
+              <a:t>앞의 세 회차에서는 에이전트를 만들고 검증했습니다. 오늘부터는 그 에이전트의 추천을 사람의 승인과 시스템의 실행으로 잇는 프로세스를 다룹니다. 프로세스의 정의와 BPMN 표기와 실행 방식을 짚은 뒤, 네 실습에서 긴급 대응 프로세스를 직접 그려 배포합니다.</a:t>
             </a:r>
           </a:p>
         </p:txBody>
@@ -1097,7 +1097,7 @@
           <a:lstStyle/>
           <a:p>
             <a:r>
-              <a:t>그림을 그렸다고 업무가 수행되지는 않습니다. 에이전트가 판단을 제출하면 누군가 운전원에게 승인 작업을 놓아야 합니다. 승인의 결과를 게이트웨이에 전해야 하고, 운전원이 한참 뒤에 응답하더라도 어디까지 왔는지를 기억하고 있어야 합니다. 그림을 읽어 이 세 가지를 하는 실행 주체가 필요합니다.</a:t>
+              <a:t>그림을 그렸다고 업무가 수행되지는 않습니다. 에이전트가 추천안을 제출하면 누군가 운전원에게 승인 작업을 놓아야 합니다. 승인의 결과를 게이트웨이에 전해야 하고, 운전원이 한참 뒤에 응답하더라도 어디까지 왔는지를 기억하고 있어야 합니다. 그림을 읽어 이 세 가지를 하는 실행 주체가 필요합니다.</a:t>
             </a:r>
           </a:p>
         </p:txBody>
@@ -1307,7 +1307,7 @@
           <a:lstStyle/>
           <a:p>
             <a:r>
-              <a:t>에이전트가 원인을 쿨러 핀 오염으로 가리고 팬 최대 운전을 추천한 시점에서 시작하겠습니다. 추천은 나왔지만 팬은 아직 그대로 돌고 유온도 그대로입니다. 운전원의 승인, 설비로 가는 냉각 명령, 유온을 다시 읽는 재관측, 핀 세척을 위한 작업지시 등록, 결과 보고가 남아 있습니다.</a:t>
+              <a:t>에이전트가 원인을 쿨러 핀 오염으로 가리고 팬 최대 운전을 추천한 시점에서 시작하겠습니다. 에이전트가 낸 것, 곧 추천 하나와 대안과 그 이유를 묶은 것이 앞 회차에서 본 추천안입니다. 추천안은 나왔지만 팬은 아직 그대로 돌고 유온도 그대로입니다. 운전원의 승인, 설비로 가는 냉각 명령, 유온을 다시 읽는 재관측, 핀 세척을 위한 작업지시 등록, 결과 보고가 남아 있습니다.</a:t>
             </a:r>
           </a:p>
         </p:txBody>
@@ -1657,7 +1657,7 @@
           <a:lstStyle/>
           <a:p>
             <a:r>
-              <a:t>뜻은 앞에서 풀었으므로 여기서는 이름과 자리만 확인합니다. SCADA는 설비를 감시하고 제어하는 시스템으로, 승인된 냉각 명령을 받아 PLC에 전합니다. CMMS는 정비 작업을 관리하는 시스템으로, 작업지시가 여기에 등록됩니다. 이 일곱과 함께 비즈니스 프로세스, 이벤트, 작업, 게이트웨이, 풀과 레인, 프로세스 정의와 인스턴스가 오늘의 용어입니다. 하나를 골라 자료를 덮고 자신의 문장으로 써 보시기 바랍니다.</a:t>
+              <a:t>SCADA는 설비를 감시하고 제어하는 시스템으로, 승인된 냉각 명령을 받아 PLC에 전합니다. CMMS는 정비 작업을 관리하는 시스템으로, 작업지시가 여기에 등록됩니다. 이 일곱과 함께 비즈니스 프로세스, 이벤트, 작업, 게이트웨이, 풀과 레인, 프로세스 정의와 인스턴스가 오늘의 용어입니다. 긴급 대응 프로세스의 그림을 펴 놓고 용어마다 해당하는 도형을 짚어 보시기 바랍니다.</a:t>
             </a:r>
           </a:p>
         </p:txBody>
@@ -1937,7 +1937,7 @@
           <a:lstStyle/>
           <a:p>
             <a:r>
-              <a:t>정답보다 판단 기준이 중요합니다. 첫 문항의 4번은 알림 가지의 끝과 처리 건의 끝을 혼동한 것입니다. 둘째 문항의 3번은 인스턴스가 만들어지는 것을 정의가 만들어지는 것으로 읽은 것입니다. 셋째 문항의 3번은 결정하는 쪽과 다음 작업을 여는 쪽을 혼동한 것입니다.</a:t>
+              <a:t>첫 문항의 4번은 알림 가지의 끝과 처리 건의 끝을 혼동한 것입니다. 둘째 문항의 3번은 인스턴스가 만들어지는 것을 정의가 만들어지는 것으로 읽은 것입니다. 셋째 문항의 3번은 결정하는 쪽과 다음 작업을 여는 쪽을 혼동한 것입니다.</a:t>
             </a:r>
           </a:p>
         </p:txBody>
@@ -6656,7 +6656,7 @@
       </p:sp>
       <p:pic>
         <p:nvPicPr>
-          <p:cNvPr id="6" name="삽화:흐름_전체.svg" descr="illust_4701525306918566425_1791735769.png"/>
+          <p:cNvPr id="6" name="삽화:흐름_전체.svg" descr="illust_6014985819386829713_1791735769.png"/>
           <p:cNvPicPr>
             <a:picLocks noChangeAspect="1"/>
           </p:cNvPicPr>
@@ -7524,7 +7524,7 @@
       </p:sp>
       <p:pic>
         <p:nvPicPr>
-          <p:cNvPr id="6" name="삽화:이벤트.svg" descr="illust_2354739156562542482_1791735769.png"/>
+          <p:cNvPr id="6" name="삽화:이벤트.svg" descr="illust_3889190051502332991_1791735769.png"/>
           <p:cNvPicPr>
             <a:picLocks noChangeAspect="1"/>
           </p:cNvPicPr>
@@ -8014,7 +8014,7 @@
       </p:sp>
       <p:pic>
         <p:nvPicPr>
-          <p:cNvPr id="6" name="삽화:작업종류.svg" descr="illust_1927571425715457758_1791735769.png"/>
+          <p:cNvPr id="6" name="삽화:작업종류.svg" descr="illust_5845351609922499831_1791735769.png"/>
           <p:cNvPicPr>
             <a:picLocks noChangeAspect="1"/>
           </p:cNvPicPr>
@@ -8672,7 +8672,7 @@
       </p:sp>
       <p:pic>
         <p:nvPicPr>
-          <p:cNvPr id="6" name="삽화:게이트웨이.svg" descr="illust_6520716322086374794_1791735769.png"/>
+          <p:cNvPr id="6" name="삽화:게이트웨이.svg" descr="illust_1561417333345292823_1791735769.png"/>
           <p:cNvPicPr>
             <a:picLocks noChangeAspect="1"/>
           </p:cNvPicPr>
@@ -9267,7 +9267,7 @@
       </p:sp>
       <p:pic>
         <p:nvPicPr>
-          <p:cNvPr id="6" name="삽화:풀과레인.svg" descr="illust_7106216621252298783_1791735769.png"/>
+          <p:cNvPr id="6" name="삽화:풀과레인.svg" descr="illust_1425942374797988089_1791735769.png"/>
           <p:cNvPicPr>
             <a:picLocks noChangeAspect="1"/>
           </p:cNvPicPr>
@@ -9883,7 +9883,7 @@
       </p:sp>
       <p:pic>
         <p:nvPicPr>
-          <p:cNvPr id="6" name="삽화:경계타이머.svg" descr="illust_886228050904695173_1791735769.png"/>
+          <p:cNvPr id="6" name="삽화:경계타이머.svg" descr="illust_9077386304421783564_1791735769.png"/>
           <p:cNvPicPr>
             <a:picLocks noChangeAspect="1"/>
           </p:cNvPicPr>
@@ -10373,7 +10373,7 @@
       </p:sp>
       <p:pic>
         <p:nvPicPr>
-          <p:cNvPr id="6" name="삽화:승인자리.svg" descr="illust_7669893451573222790_1791735769.png"/>
+          <p:cNvPr id="6" name="삽화:승인자리.svg" descr="illust_2112284859090722211_1791735769.png"/>
           <p:cNvPicPr>
             <a:picLocks noChangeAspect="1"/>
           </p:cNvPicPr>
@@ -15720,7 +15720,7 @@
       </p:sp>
       <p:pic>
         <p:nvPicPr>
-          <p:cNvPr id="6" name="삽화:정의와인스턴스.svg" descr="illust_11058753127625810_1791735769.png"/>
+          <p:cNvPr id="6" name="삽화:정의와인스턴스.svg" descr="illust_8690947670931042807_1791735769.png"/>
           <p:cNvPicPr>
             <a:picLocks noChangeAspect="1"/>
           </p:cNvPicPr>
@@ -20830,7 +20830,7 @@
                 <a:ea typeface="맑은 고딕"/>
                 <a:cs typeface="맑은 고딕"/>
               </a:rPr>
-              <a:t>이 실습을 마치면 직접 그린 프로세스가 쿨러 경보를 받도록 등록되고 배포된 상태가 된다.</a:t>
+              <a:t>직접 그린 프로세스는 시작 조건과 맡을 쪽을 정해 등록하고 배포해야 쿨러 경보를 받아 열린다.</a:t>
             </a:r>
           </a:p>
         </p:txBody>
@@ -24306,7 +24306,7 @@
                 <a:ea typeface="맑은 고딕"/>
                 <a:cs typeface="맑은 고딕"/>
               </a:rPr>
-              <a:t>Quiz 2. 같은 경보로 열린 두 처리 건</a:t>
+              <a:t>Quiz 2. 같은 종류의 경보 두 건으로 열린 처리 건</a:t>
             </a:r>
           </a:p>
         </p:txBody>
@@ -24345,7 +24345,7 @@
                 <a:ea typeface="맑은 고딕"/>
                 <a:cs typeface="맑은 고딕"/>
               </a:rPr>
-              <a:t>쿨러 성능 저하 경보가 두 번 도착해 처리 건 둘이 열렸고, 하나는 승인되어 끝났으며 다른 하나는 거절로 끝났다.</a:t>
+              <a:t>쿨러 성능 저하 경보가 두 건 도착해 처리 건 둘이 열렸고, 하나는 승인되어 끝났으며 다른 하나는 거절로 끝났다.</a:t>
             </a:r>
           </a:p>
         </p:txBody>
@@ -25139,7 +25139,7 @@
                 <a:ea typeface="맑은 고딕"/>
                 <a:cs typeface="맑은 고딕"/>
               </a:rPr>
-              <a:t>에이전트가 팬 최대 운전을 추천해 판단을 제출했고, 처리 건은 운전원 승인에서 기다리고 있다.</a:t>
+              <a:t>에이전트가 팬 최대 운전을 권하는 추천안을 제출했고, 처리 건은 운전원 승인에서 기다리고 있다.</a:t>
             </a:r>
           </a:p>
         </p:txBody>
@@ -25415,7 +25415,7 @@
                 <a:ea typeface="맑은 고딕"/>
                 <a:cs typeface="맑은 고딕"/>
               </a:rPr>
-              <a:t>추천을 제출한 에이전트</a:t>
+              <a:t>추천안을 제출한 에이전트</a:t>
             </a:r>
           </a:p>
         </p:txBody>
@@ -26996,7 +26996,7 @@
                 <a:ea typeface="맑은 고딕"/>
                 <a:cs typeface="맑은 고딕"/>
               </a:rPr>
-              <a:t>에이전트가 팬 최대 운전을 추천한 시점에 유온은 그대로이며, 승인에서 결과 보고까지 다섯 가지 일이 남아 있다.</a:t>
+              <a:t>팬 최대 운전을 권하는 추천안이 나온 시점에 유온은 그대로이며, 승인에서 결과 보고까지 다섯 가지 일이 남아 있다.</a:t>
             </a:r>
           </a:p>
         </p:txBody>
@@ -27071,7 +27071,7 @@
       </p:sp>
       <p:pic>
         <p:nvPicPr>
-          <p:cNvPr id="6" name="삽화:남은일_추천뒤.svg" descr="illust_316579673618501675_1791735769.png"/>
+          <p:cNvPr id="6" name="삽화:남은일_추천뒤.svg" descr="illust_171981655173697346_1791735769.png"/>
           <p:cNvPicPr>
             <a:picLocks noChangeAspect="1"/>
           </p:cNvPicPr>
@@ -28935,7 +28935,7 @@
                 <a:ea typeface="맑은 고딕"/>
                 <a:cs typeface="맑은 고딕"/>
               </a:rPr>
-              <a:t>에이전트의 추천, 운전원의 승인, 시스템의 명령과 기록이 한 순서로 이어진다.</a:t>
+              <a:t>에이전트의 추천안, 운전원의 승인, 시스템의 명령과 기록이 한 순서로 이어진다.</a:t>
             </a:r>
           </a:p>
         </p:txBody>

--- a/docs/교재/실전반_오프라인/07회차/실전반_오프라인_07회차.pptx
+++ b/docs/교재/실전반_오프라인/07회차/실전반_오프라인_07회차.pptx
@@ -6656,7 +6656,7 @@
       </p:sp>
       <p:pic>
         <p:nvPicPr>
-          <p:cNvPr id="6" name="삽화:흐름_전체.svg" descr="illust_6014985819386829713_1791735769.png"/>
+          <p:cNvPr id="6" name="삽화:흐름_전체.svg" descr="illust_5086763413033115371_1791735769.png"/>
           <p:cNvPicPr>
             <a:picLocks noChangeAspect="1"/>
           </p:cNvPicPr>
@@ -7524,7 +7524,7 @@
       </p:sp>
       <p:pic>
         <p:nvPicPr>
-          <p:cNvPr id="6" name="삽화:이벤트.svg" descr="illust_3889190051502332991_1791735769.png"/>
+          <p:cNvPr id="6" name="삽화:이벤트.svg" descr="illust_3920554997863678585_1791735769.png"/>
           <p:cNvPicPr>
             <a:picLocks noChangeAspect="1"/>
           </p:cNvPicPr>
@@ -8014,7 +8014,7 @@
       </p:sp>
       <p:pic>
         <p:nvPicPr>
-          <p:cNvPr id="6" name="삽화:작업종류.svg" descr="illust_5845351609922499831_1791735769.png"/>
+          <p:cNvPr id="6" name="삽화:작업종류.svg" descr="illust_8670144169931192220_1791735769.png"/>
           <p:cNvPicPr>
             <a:picLocks noChangeAspect="1"/>
           </p:cNvPicPr>
@@ -8672,7 +8672,7 @@
       </p:sp>
       <p:pic>
         <p:nvPicPr>
-          <p:cNvPr id="6" name="삽화:게이트웨이.svg" descr="illust_1561417333345292823_1791735769.png"/>
+          <p:cNvPr id="6" name="삽화:게이트웨이.svg" descr="illust_209157670414084074_1791735769.png"/>
           <p:cNvPicPr>
             <a:picLocks noChangeAspect="1"/>
           </p:cNvPicPr>
@@ -9267,7 +9267,7 @@
       </p:sp>
       <p:pic>
         <p:nvPicPr>
-          <p:cNvPr id="6" name="삽화:풀과레인.svg" descr="illust_1425942374797988089_1791735769.png"/>
+          <p:cNvPr id="6" name="삽화:풀과레인.svg" descr="illust_3071349422252180038_1791735769.png"/>
           <p:cNvPicPr>
             <a:picLocks noChangeAspect="1"/>
           </p:cNvPicPr>
@@ -9883,7 +9883,7 @@
       </p:sp>
       <p:pic>
         <p:nvPicPr>
-          <p:cNvPr id="6" name="삽화:경계타이머.svg" descr="illust_9077386304421783564_1791735769.png"/>
+          <p:cNvPr id="6" name="삽화:경계타이머.svg" descr="illust_4166414339729428901_1791735769.png"/>
           <p:cNvPicPr>
             <a:picLocks noChangeAspect="1"/>
           </p:cNvPicPr>
@@ -10373,7 +10373,7 @@
       </p:sp>
       <p:pic>
         <p:nvPicPr>
-          <p:cNvPr id="6" name="삽화:승인자리.svg" descr="illust_2112284859090722211_1791735769.png"/>
+          <p:cNvPr id="6" name="삽화:승인자리.svg" descr="illust_8764515009030152283_1791735769.png"/>
           <p:cNvPicPr>
             <a:picLocks noChangeAspect="1"/>
           </p:cNvPicPr>
@@ -15720,7 +15720,7 @@
       </p:sp>
       <p:pic>
         <p:nvPicPr>
-          <p:cNvPr id="6" name="삽화:정의와인스턴스.svg" descr="illust_8690947670931042807_1791735769.png"/>
+          <p:cNvPr id="6" name="삽화:정의와인스턴스.svg" descr="illust_3402941908057992228_1791735769.png"/>
           <p:cNvPicPr>
             <a:picLocks noChangeAspect="1"/>
           </p:cNvPicPr>
@@ -23447,7 +23447,7 @@
                 <a:ea typeface="맑은 고딕"/>
                 <a:cs typeface="맑은 고딕"/>
               </a:rPr>
-              <a:t>배운 내용을 바탕으로 정답을 맞춰보세요.</a:t>
+              <a:t>배운 내용을 바탕으로 정답을 맞혀 보세요.</a:t>
             </a:r>
           </a:p>
         </p:txBody>
@@ -27071,7 +27071,7 @@
       </p:sp>
       <p:pic>
         <p:nvPicPr>
-          <p:cNvPr id="6" name="삽화:남은일_추천뒤.svg" descr="illust_171981655173697346_1791735769.png"/>
+          <p:cNvPr id="6" name="삽화:남은일_추천뒤.svg" descr="illust_1386914032164910940_1791735769.png"/>
           <p:cNvPicPr>
             <a:picLocks noChangeAspect="1"/>
           </p:cNvPicPr>
